--- a/generated/Tier 1 Broker Scorecards/GoldenEra Insurance Agency_Broker_Scorecard.pptx
+++ b/generated/Tier 1 Broker Scorecards/GoldenEra Insurance Agency_Broker_Scorecard.pptx
@@ -3357,7 +3357,7 @@
                         <a:rPr sz="800">
                           <a:latin typeface="Segoe UI"/>
                         </a:rPr>
-                        <a:t>$9,867,855.80 / $10,292,202.74 / $3,457,917.55</a:t>
+                        <a:t>$9,867,855.80 / $10,292,332.24 / $3,458,047.05</a:t>
                       </a:r>
                     </a:p>
                   </a:txBody>
@@ -3394,7 +3394,7 @@
                         <a:rPr sz="900">
                           <a:latin typeface="Segoe UI"/>
                         </a:rPr>
-                        <a:t>Tier 1  |  25.00% / 15.00%</a:t>
+                        <a:t>Tier 1  |  25.51% / 15.00%</a:t>
                       </a:r>
                     </a:p>
                   </a:txBody>
@@ -3653,7 +3653,7 @@
                         <a:rPr sz="900">
                           <a:latin typeface="Segoe UI"/>
                         </a:rPr>
-                        <a:t>Fleet Subs: 36  |  Binds: 18</a:t>
+                        <a:t>Fleet Subs: 36  |  Binds: 19</a:t>
                       </a:r>
                     </a:p>
                   </a:txBody>
@@ -3690,7 +3690,7 @@
                         <a:rPr sz="900">
                           <a:latin typeface="Segoe UI"/>
                         </a:rPr>
-                        <a:t>Fleet Bound Premium: $2,531,108.22</a:t>
+                        <a:t>Fleet Bound Premium: $2,620,411.79</a:t>
                       </a:r>
                     </a:p>
                   </a:txBody>
@@ -3727,7 +3727,7 @@
                         <a:rPr sz="900">
                           <a:latin typeface="Segoe UI"/>
                         </a:rPr>
-                        <a:t>Fleet Book %: 73.2%</a:t>
+                        <a:t>Fleet Book %: 75.8%</a:t>
                       </a:r>
                     </a:p>
                   </a:txBody>
@@ -3803,7 +3803,7 @@
                         <a:rPr sz="900">
                           <a:latin typeface="Segoe UI"/>
                         </a:rPr>
-                        <a:t>Non-Fleet Bound Premium: $926,809.33</a:t>
+                        <a:t>Non-Fleet Bound Premium: $837,635.26</a:t>
                       </a:r>
                     </a:p>
                   </a:txBody>
@@ -3840,7 +3840,7 @@
                         <a:rPr sz="900">
                           <a:latin typeface="Segoe UI"/>
                         </a:rPr>
-                        <a:t>Non-Fleet Book %: 26.8%</a:t>
+                        <a:t>Non-Fleet Book %: 24.2%</a:t>
                       </a:r>
                     </a:p>
                   </a:txBody>
@@ -4428,7 +4428,7 @@
                           </a:solidFill>
                           <a:latin typeface="Segoe UI"/>
                         </a:rPr>
-                        <a:t>22</a:t>
+                        <a:t>23</a:t>
                       </a:r>
                     </a:p>
                   </a:txBody>
@@ -4624,7 +4624,7 @@
                           </a:solidFill>
                           <a:latin typeface="Segoe UI"/>
                         </a:rPr>
-                        <a:t>51.2%</a:t>
+                        <a:t>53.7%</a:t>
                       </a:r>
                     </a:p>
                   </a:txBody>
@@ -4707,7 +4707,7 @@
                           </a:solidFill>
                           <a:latin typeface="Segoe UI"/>
                         </a:rPr>
-                        <a:t>22.7%</a:t>
+                        <a:t>21.7%</a:t>
                       </a:r>
                     </a:p>
                   </a:txBody>
@@ -4906,7 +4906,7 @@
                           </a:solidFill>
                           <a:latin typeface="Segoe UI"/>
                         </a:rPr>
-                        <a:t>21</a:t>
+                        <a:t>22</a:t>
                       </a:r>
                     </a:p>
                   </a:txBody>
@@ -5262,7 +5262,7 @@
                           </a:solidFill>
                           <a:latin typeface="Segoe UI"/>
                         </a:rPr>
-                        <a:t>$43.9K</a:t>
+                        <a:t>$44.0K</a:t>
                       </a:r>
                     </a:p>
                   </a:txBody>

--- a/generated/Tier 1 Broker Scorecards/GoldenEra Insurance Agency_Broker_Scorecard.pptx
+++ b/generated/Tier 1 Broker Scorecards/GoldenEra Insurance Agency_Broker_Scorecard.pptx
@@ -3394,7 +3394,7 @@
                         <a:rPr sz="900">
                           <a:latin typeface="Segoe UI"/>
                         </a:rPr>
-                        <a:t>Tier 1  |  25.51% / 15.00%</a:t>
+                        <a:t>Tier 1  |  23.35% / 15.00%</a:t>
                       </a:r>
                     </a:p>
                   </a:txBody>
@@ -3653,7 +3653,7 @@
                         <a:rPr sz="900">
                           <a:latin typeface="Segoe UI"/>
                         </a:rPr>
-                        <a:t>Fleet Subs: 36  |  Binds: 19</a:t>
+                        <a:t>Fleet Subs: 35  |  Binds: 18</a:t>
                       </a:r>
                     </a:p>
                   </a:txBody>
@@ -3690,7 +3690,7 @@
                         <a:rPr sz="900">
                           <a:latin typeface="Segoe UI"/>
                         </a:rPr>
-                        <a:t>Fleet Bound Premium: $2,620,411.79</a:t>
+                        <a:t>Fleet Bound Premium: $2,668,682.91</a:t>
                       </a:r>
                     </a:p>
                   </a:txBody>
@@ -3727,7 +3727,7 @@
                         <a:rPr sz="900">
                           <a:latin typeface="Segoe UI"/>
                         </a:rPr>
-                        <a:t>Fleet Book %: 75.8%</a:t>
+                        <a:t>Fleet Book %: 77.2%</a:t>
                       </a:r>
                     </a:p>
                   </a:txBody>
@@ -3766,7 +3766,7 @@
                         <a:rPr sz="900">
                           <a:latin typeface="Segoe UI"/>
                         </a:rPr>
-                        <a:t>Non-Fleet Subs: 160  |  Binds: 31</a:t>
+                        <a:t>Non-Fleet Subs: 162  |  Binds: 28</a:t>
                       </a:r>
                     </a:p>
                   </a:txBody>
@@ -3803,7 +3803,7 @@
                         <a:rPr sz="900">
                           <a:latin typeface="Segoe UI"/>
                         </a:rPr>
-                        <a:t>Non-Fleet Bound Premium: $837,635.26</a:t>
+                        <a:t>Non-Fleet Bound Premium: $789,364.14</a:t>
                       </a:r>
                     </a:p>
                   </a:txBody>
@@ -3840,7 +3840,7 @@
                         <a:rPr sz="900">
                           <a:latin typeface="Segoe UI"/>
                         </a:rPr>
-                        <a:t>Non-Fleet Book %: 24.2%</a:t>
+                        <a:t>Non-Fleet Book %: 22.8%</a:t>
                       </a:r>
                     </a:p>
                   </a:txBody>
@@ -4351,7 +4351,7 @@
                           </a:solidFill>
                           <a:latin typeface="Segoe UI"/>
                         </a:rPr>
-                        <a:t>41</a:t>
+                        <a:t>40</a:t>
                       </a:r>
                     </a:p>
                   </a:txBody>
@@ -4428,7 +4428,7 @@
                           </a:solidFill>
                           <a:latin typeface="Segoe UI"/>
                         </a:rPr>
-                        <a:t>23</a:t>
+                        <a:t>28</a:t>
                       </a:r>
                     </a:p>
                   </a:txBody>
@@ -4624,7 +4624,7 @@
                           </a:solidFill>
                           <a:latin typeface="Segoe UI"/>
                         </a:rPr>
-                        <a:t>53.7%</a:t>
+                        <a:t>52.5%</a:t>
                       </a:r>
                     </a:p>
                   </a:txBody>
@@ -4707,7 +4707,7 @@
                           </a:solidFill>
                           <a:latin typeface="Segoe UI"/>
                         </a:rPr>
-                        <a:t>21.7%</a:t>
+                        <a:t>21.4%</a:t>
                       </a:r>
                     </a:p>
                   </a:txBody>
@@ -4906,7 +4906,7 @@
                           </a:solidFill>
                           <a:latin typeface="Segoe UI"/>
                         </a:rPr>
-                        <a:t>22</a:t>
+                        <a:t>21</a:t>
                       </a:r>
                     </a:p>
                   </a:txBody>
@@ -4983,7 +4983,7 @@
                           </a:solidFill>
                           <a:latin typeface="Segoe UI"/>
                         </a:rPr>
-                        <a:t>5</a:t>
+                        <a:t>6</a:t>
                       </a:r>
                     </a:p>
                   </a:txBody>

--- a/generated/Tier 1 Broker Scorecards/GoldenEra Insurance Agency_Broker_Scorecard.pptx
+++ b/generated/Tier 1 Broker Scorecards/GoldenEra Insurance Agency_Broker_Scorecard.pptx
@@ -3357,7 +3357,7 @@
                         <a:rPr sz="800">
                           <a:latin typeface="Segoe UI"/>
                         </a:rPr>
-                        <a:t>$9,867,855.80 / $10,292,332.24 / $3,458,047.05</a:t>
+                        <a:t>$9,867,855.80 / $10,476,424.07 / $3,642,138.88</a:t>
                       </a:r>
                     </a:p>
                   </a:txBody>
@@ -3394,7 +3394,7 @@
                         <a:rPr sz="900">
                           <a:latin typeface="Segoe UI"/>
                         </a:rPr>
-                        <a:t>Tier 1  |  23.35% / 15.00%</a:t>
+                        <a:t>Tier 1  |  24.37% / 15.00%</a:t>
                       </a:r>
                     </a:p>
                   </a:txBody>
@@ -3431,7 +3431,7 @@
                         <a:rPr sz="900">
                           <a:latin typeface="Segoe UI"/>
                         </a:rPr>
-                        <a:t>$13,814,998.12  (25.0% achieved)</a:t>
+                        <a:t>$13,814,998.12  (26.4% achieved)</a:t>
                       </a:r>
                     </a:p>
                   </a:txBody>
@@ -3653,7 +3653,7 @@
                         <a:rPr sz="900">
                           <a:latin typeface="Segoe UI"/>
                         </a:rPr>
-                        <a:t>Fleet Subs: 35  |  Binds: 18</a:t>
+                        <a:t>Fleet Subs: 37  |  Binds: 20</a:t>
                       </a:r>
                     </a:p>
                   </a:txBody>
@@ -3690,7 +3690,7 @@
                         <a:rPr sz="900">
                           <a:latin typeface="Segoe UI"/>
                         </a:rPr>
-                        <a:t>Fleet Bound Premium: $2,668,682.91</a:t>
+                        <a:t>Fleet Bound Premium: $2,852,038.59</a:t>
                       </a:r>
                     </a:p>
                   </a:txBody>
@@ -3727,7 +3727,7 @@
                         <a:rPr sz="900">
                           <a:latin typeface="Segoe UI"/>
                         </a:rPr>
-                        <a:t>Fleet Book %: 77.2%</a:t>
+                        <a:t>Fleet Book %: 78.3%</a:t>
                       </a:r>
                     </a:p>
                   </a:txBody>
@@ -3766,7 +3766,7 @@
                         <a:rPr sz="900">
                           <a:latin typeface="Segoe UI"/>
                         </a:rPr>
-                        <a:t>Non-Fleet Subs: 162  |  Binds: 28</a:t>
+                        <a:t>Non-Fleet Subs: 160  |  Binds: 28</a:t>
                       </a:r>
                     </a:p>
                   </a:txBody>
@@ -3803,7 +3803,7 @@
                         <a:rPr sz="900">
                           <a:latin typeface="Segoe UI"/>
                         </a:rPr>
-                        <a:t>Non-Fleet Bound Premium: $789,364.14</a:t>
+                        <a:t>Non-Fleet Bound Premium: $790,100.29</a:t>
                       </a:r>
                     </a:p>
                   </a:txBody>
@@ -3840,7 +3840,7 @@
                         <a:rPr sz="900">
                           <a:latin typeface="Segoe UI"/>
                         </a:rPr>
-                        <a:t>Non-Fleet Book %: 22.8%</a:t>
+                        <a:t>Non-Fleet Book %: 21.7%</a:t>
                       </a:r>
                     </a:p>
                   </a:txBody>
@@ -4428,7 +4428,7 @@
                           </a:solidFill>
                           <a:latin typeface="Segoe UI"/>
                         </a:rPr>
-                        <a:t>28</a:t>
+                        <a:t>29</a:t>
                       </a:r>
                     </a:p>
                   </a:txBody>
@@ -4707,7 +4707,7 @@
                           </a:solidFill>
                           <a:latin typeface="Segoe UI"/>
                         </a:rPr>
-                        <a:t>21.4%</a:t>
+                        <a:t>31.0%</a:t>
                       </a:r>
                     </a:p>
                   </a:txBody>
@@ -4983,7 +4983,7 @@
                           </a:solidFill>
                           <a:latin typeface="Segoe UI"/>
                         </a:rPr>
-                        <a:t>6</a:t>
+                        <a:t>9</a:t>
                       </a:r>
                     </a:p>
                   </a:txBody>
@@ -5262,7 +5262,7 @@
                           </a:solidFill>
                           <a:latin typeface="Segoe UI"/>
                         </a:rPr>
-                        <a:t>$44.0K</a:t>
+                        <a:t>$228.1K</a:t>
                       </a:r>
                     </a:p>
                   </a:txBody>

--- a/generated/Tier 1 Broker Scorecards/GoldenEra Insurance Agency_Broker_Scorecard.pptx
+++ b/generated/Tier 1 Broker Scorecards/GoldenEra Insurance Agency_Broker_Scorecard.pptx
@@ -3357,7 +3357,7 @@
                         <a:rPr sz="800">
                           <a:latin typeface="Segoe UI"/>
                         </a:rPr>
-                        <a:t>$9,867,855.80 / $10,476,424.07 / $3,642,138.88</a:t>
+                        <a:t>$9,867,855.80 / $10,584,206.22 / $3,749,921.03</a:t>
                       </a:r>
                     </a:p>
                   </a:txBody>
@@ -3394,7 +3394,7 @@
                         <a:rPr sz="900">
                           <a:latin typeface="Segoe UI"/>
                         </a:rPr>
-                        <a:t>Tier 1  |  24.37% / 15.00%</a:t>
+                        <a:t>Tier 1  |  25.38% / 15.00%</a:t>
                       </a:r>
                     </a:p>
                   </a:txBody>
@@ -3431,7 +3431,7 @@
                         <a:rPr sz="900">
                           <a:latin typeface="Segoe UI"/>
                         </a:rPr>
-                        <a:t>$13,814,998.12  (26.4% achieved)</a:t>
+                        <a:t>$13,814,998.12  (27.1% achieved)</a:t>
                       </a:r>
                     </a:p>
                   </a:txBody>
@@ -3653,7 +3653,7 @@
                         <a:rPr sz="900">
                           <a:latin typeface="Segoe UI"/>
                         </a:rPr>
-                        <a:t>Fleet Subs: 37  |  Binds: 20</a:t>
+                        <a:t>Fleet Subs: 39  |  Binds: 22</a:t>
                       </a:r>
                     </a:p>
                   </a:txBody>
@@ -3690,7 +3690,7 @@
                         <a:rPr sz="900">
                           <a:latin typeface="Segoe UI"/>
                         </a:rPr>
-                        <a:t>Fleet Bound Premium: $2,852,038.59</a:t>
+                        <a:t>Fleet Bound Premium: $3,014,187.62</a:t>
                       </a:r>
                     </a:p>
                   </a:txBody>
@@ -3727,7 +3727,7 @@
                         <a:rPr sz="900">
                           <a:latin typeface="Segoe UI"/>
                         </a:rPr>
-                        <a:t>Fleet Book %: 78.3%</a:t>
+                        <a:t>Fleet Book %: 80.4%</a:t>
                       </a:r>
                     </a:p>
                   </a:txBody>
@@ -3766,7 +3766,7 @@
                         <a:rPr sz="900">
                           <a:latin typeface="Segoe UI"/>
                         </a:rPr>
-                        <a:t>Non-Fleet Subs: 160  |  Binds: 28</a:t>
+                        <a:t>Non-Fleet Subs: 158  |  Binds: 28</a:t>
                       </a:r>
                     </a:p>
                   </a:txBody>
@@ -3803,7 +3803,7 @@
                         <a:rPr sz="900">
                           <a:latin typeface="Segoe UI"/>
                         </a:rPr>
-                        <a:t>Non-Fleet Bound Premium: $790,100.29</a:t>
+                        <a:t>Non-Fleet Bound Premium: $735,733.41</a:t>
                       </a:r>
                     </a:p>
                   </a:txBody>
@@ -3840,7 +3840,7 @@
                         <a:rPr sz="900">
                           <a:latin typeface="Segoe UI"/>
                         </a:rPr>
-                        <a:t>Non-Fleet Book %: 21.7%</a:t>
+                        <a:t>Non-Fleet Book %: 19.6%</a:t>
                       </a:r>
                     </a:p>
                   </a:txBody>
@@ -4428,7 +4428,7 @@
                           </a:solidFill>
                           <a:latin typeface="Segoe UI"/>
                         </a:rPr>
-                        <a:t>29</a:t>
+                        <a:t>30</a:t>
                       </a:r>
                     </a:p>
                   </a:txBody>
@@ -4707,7 +4707,7 @@
                           </a:solidFill>
                           <a:latin typeface="Segoe UI"/>
                         </a:rPr>
-                        <a:t>31.0%</a:t>
+                        <a:t>36.7%</a:t>
                       </a:r>
                     </a:p>
                   </a:txBody>
@@ -4983,7 +4983,7 @@
                           </a:solidFill>
                           <a:latin typeface="Segoe UI"/>
                         </a:rPr>
-                        <a:t>9</a:t>
+                        <a:t>11</a:t>
                       </a:r>
                     </a:p>
                   </a:txBody>
@@ -5262,7 +5262,7 @@
                           </a:solidFill>
                           <a:latin typeface="Segoe UI"/>
                         </a:rPr>
-                        <a:t>$228.1K</a:t>
+                        <a:t>$335.9K</a:t>
                       </a:r>
                     </a:p>
                   </a:txBody>

--- a/generated/Tier 1 Broker Scorecards/GoldenEra Insurance Agency_Broker_Scorecard.pptx
+++ b/generated/Tier 1 Broker Scorecards/GoldenEra Insurance Agency_Broker_Scorecard.pptx
@@ -3394,7 +3394,7 @@
                         <a:rPr sz="900">
                           <a:latin typeface="Segoe UI"/>
                         </a:rPr>
-                        <a:t>Tier 1  |  25.38% / 15.00%</a:t>
+                        <a:t>Tier 1  |  23.35% / 15.00%</a:t>
                       </a:r>
                     </a:p>
                   </a:txBody>
@@ -3653,7 +3653,7 @@
                         <a:rPr sz="900">
                           <a:latin typeface="Segoe UI"/>
                         </a:rPr>
-                        <a:t>Fleet Subs: 39  |  Binds: 22</a:t>
+                        <a:t>Fleet Subs: 39  |  Binds: 18</a:t>
                       </a:r>
                     </a:p>
                   </a:txBody>
@@ -3690,7 +3690,7 @@
                         <a:rPr sz="900">
                           <a:latin typeface="Segoe UI"/>
                         </a:rPr>
-                        <a:t>Fleet Bound Premium: $3,014,187.62</a:t>
+                        <a:t>Fleet Bound Premium: $2,911,237.94</a:t>
                       </a:r>
                     </a:p>
                   </a:txBody>
@@ -3727,7 +3727,7 @@
                         <a:rPr sz="900">
                           <a:latin typeface="Segoe UI"/>
                         </a:rPr>
-                        <a:t>Fleet Book %: 80.4%</a:t>
+                        <a:t>Fleet Book %: 77.6%</a:t>
                       </a:r>
                     </a:p>
                   </a:txBody>
@@ -3803,7 +3803,7 @@
                         <a:rPr sz="900">
                           <a:latin typeface="Segoe UI"/>
                         </a:rPr>
-                        <a:t>Non-Fleet Bound Premium: $735,733.41</a:t>
+                        <a:t>Non-Fleet Bound Premium: $838,683.09</a:t>
                       </a:r>
                     </a:p>
                   </a:txBody>
@@ -3840,7 +3840,7 @@
                         <a:rPr sz="900">
                           <a:latin typeface="Segoe UI"/>
                         </a:rPr>
-                        <a:t>Non-Fleet Book %: 19.6%</a:t>
+                        <a:t>Non-Fleet Book %: 22.4%</a:t>
                       </a:r>
                     </a:p>
                   </a:txBody>
@@ -4707,7 +4707,7 @@
                           </a:solidFill>
                           <a:latin typeface="Segoe UI"/>
                         </a:rPr>
-                        <a:t>36.7%</a:t>
+                        <a:t>23.3%</a:t>
                       </a:r>
                     </a:p>
                   </a:txBody>
@@ -4983,7 +4983,7 @@
                           </a:solidFill>
                           <a:latin typeface="Segoe UI"/>
                         </a:rPr>
-                        <a:t>11</a:t>
+                        <a:t>7</a:t>
                       </a:r>
                     </a:p>
                   </a:txBody>

--- a/generated/Tier 1 Broker Scorecards/GoldenEra Insurance Agency_Broker_Scorecard.pptx
+++ b/generated/Tier 1 Broker Scorecards/GoldenEra Insurance Agency_Broker_Scorecard.pptx
@@ -3357,7 +3357,7 @@
                         <a:rPr sz="800">
                           <a:latin typeface="Segoe UI"/>
                         </a:rPr>
-                        <a:t>$9,867,855.80 / $10,584,206.22 / $3,749,921.03</a:t>
+                        <a:t>$9,867,855.80 / $10,587,367.95 / $3,753,082.76</a:t>
                       </a:r>
                     </a:p>
                   </a:txBody>
@@ -3394,7 +3394,7 @@
                         <a:rPr sz="900">
                           <a:latin typeface="Segoe UI"/>
                         </a:rPr>
-                        <a:t>Tier 1  |  23.35% / 15.00%</a:t>
+                        <a:t>Tier 1  |  23.86% / 15.00%</a:t>
                       </a:r>
                     </a:p>
                   </a:txBody>
@@ -3431,7 +3431,7 @@
                         <a:rPr sz="900">
                           <a:latin typeface="Segoe UI"/>
                         </a:rPr>
-                        <a:t>$13,814,998.12  (27.1% achieved)</a:t>
+                        <a:t>$13,814,998.12  (27.2% achieved)</a:t>
                       </a:r>
                     </a:p>
                   </a:txBody>
@@ -3653,7 +3653,7 @@
                         <a:rPr sz="900">
                           <a:latin typeface="Segoe UI"/>
                         </a:rPr>
-                        <a:t>Fleet Subs: 39  |  Binds: 18</a:t>
+                        <a:t>Fleet Subs: 39  |  Binds: 19</a:t>
                       </a:r>
                     </a:p>
                   </a:txBody>
@@ -3690,7 +3690,7 @@
                         <a:rPr sz="900">
                           <a:latin typeface="Segoe UI"/>
                         </a:rPr>
-                        <a:t>Fleet Bound Premium: $2,911,237.94</a:t>
+                        <a:t>Fleet Bound Premium: $2,943,148.68</a:t>
                       </a:r>
                     </a:p>
                   </a:txBody>
@@ -3727,7 +3727,7 @@
                         <a:rPr sz="900">
                           <a:latin typeface="Segoe UI"/>
                         </a:rPr>
-                        <a:t>Fleet Book %: 77.6%</a:t>
+                        <a:t>Fleet Book %: 78.4%</a:t>
                       </a:r>
                     </a:p>
                   </a:txBody>
@@ -3803,7 +3803,7 @@
                         <a:rPr sz="900">
                           <a:latin typeface="Segoe UI"/>
                         </a:rPr>
-                        <a:t>Non-Fleet Bound Premium: $838,683.09</a:t>
+                        <a:t>Non-Fleet Bound Premium: $809,934.08</a:t>
                       </a:r>
                     </a:p>
                   </a:txBody>
@@ -3840,7 +3840,7 @@
                         <a:rPr sz="900">
                           <a:latin typeface="Segoe UI"/>
                         </a:rPr>
-                        <a:t>Non-Fleet Book %: 22.4%</a:t>
+                        <a:t>Non-Fleet Book %: 21.6%</a:t>
                       </a:r>
                     </a:p>
                   </a:txBody>
@@ -4707,7 +4707,7 @@
                           </a:solidFill>
                           <a:latin typeface="Segoe UI"/>
                         </a:rPr>
-                        <a:t>23.3%</a:t>
+                        <a:t>26.7%</a:t>
                       </a:r>
                     </a:p>
                   </a:txBody>
@@ -4983,7 +4983,7 @@
                           </a:solidFill>
                           <a:latin typeface="Segoe UI"/>
                         </a:rPr>
-                        <a:t>7</a:t>
+                        <a:t>8</a:t>
                       </a:r>
                     </a:p>
                   </a:txBody>
@@ -5262,7 +5262,7 @@
                           </a:solidFill>
                           <a:latin typeface="Segoe UI"/>
                         </a:rPr>
-                        <a:t>$335.9K</a:t>
+                        <a:t>$339.1K</a:t>
                       </a:r>
                     </a:p>
                   </a:txBody>

--- a/generated/Tier 1 Broker Scorecards/GoldenEra Insurance Agency_Broker_Scorecard.pptx
+++ b/generated/Tier 1 Broker Scorecards/GoldenEra Insurance Agency_Broker_Scorecard.pptx
@@ -3357,7 +3357,7 @@
                         <a:rPr sz="800">
                           <a:latin typeface="Segoe UI"/>
                         </a:rPr>
-                        <a:t>$9,867,855.80 / $10,587,367.95 / $3,753,082.76</a:t>
+                        <a:t>$9,867,855.80 / $10,586,240.12 / $3,751,954.93</a:t>
                       </a:r>
                     </a:p>
                   </a:txBody>
@@ -3394,7 +3394,7 @@
                         <a:rPr sz="900">
                           <a:latin typeface="Segoe UI"/>
                         </a:rPr>
-                        <a:t>Tier 1  |  23.86% / 15.00%</a:t>
+                        <a:t>Tier 1  |  24.37% / 15.00%</a:t>
                       </a:r>
                     </a:p>
                   </a:txBody>
@@ -3653,7 +3653,7 @@
                         <a:rPr sz="900">
                           <a:latin typeface="Segoe UI"/>
                         </a:rPr>
-                        <a:t>Fleet Subs: 39  |  Binds: 19</a:t>
+                        <a:t>Fleet Subs: 41  |  Binds: 20</a:t>
                       </a:r>
                     </a:p>
                   </a:txBody>
@@ -3690,7 +3690,7 @@
                         <a:rPr sz="900">
                           <a:latin typeface="Segoe UI"/>
                         </a:rPr>
-                        <a:t>Fleet Bound Premium: $2,943,148.68</a:t>
+                        <a:t>Fleet Bound Premium: $2,964,111.09</a:t>
                       </a:r>
                     </a:p>
                   </a:txBody>
@@ -3727,7 +3727,7 @@
                         <a:rPr sz="900">
                           <a:latin typeface="Segoe UI"/>
                         </a:rPr>
-                        <a:t>Fleet Book %: 78.4%</a:t>
+                        <a:t>Fleet Book %: 79.0%</a:t>
                       </a:r>
                     </a:p>
                   </a:txBody>
@@ -3766,7 +3766,7 @@
                         <a:rPr sz="900">
                           <a:latin typeface="Segoe UI"/>
                         </a:rPr>
-                        <a:t>Non-Fleet Subs: 158  |  Binds: 28</a:t>
+                        <a:t>Non-Fleet Subs: 156  |  Binds: 28</a:t>
                       </a:r>
                     </a:p>
                   </a:txBody>
@@ -3803,7 +3803,7 @@
                         <a:rPr sz="900">
                           <a:latin typeface="Segoe UI"/>
                         </a:rPr>
-                        <a:t>Non-Fleet Bound Premium: $809,934.08</a:t>
+                        <a:t>Non-Fleet Bound Premium: $787,843.84</a:t>
                       </a:r>
                     </a:p>
                   </a:txBody>
@@ -3840,7 +3840,7 @@
                         <a:rPr sz="900">
                           <a:latin typeface="Segoe UI"/>
                         </a:rPr>
-                        <a:t>Non-Fleet Book %: 21.6%</a:t>
+                        <a:t>Non-Fleet Book %: 21.0%</a:t>
                       </a:r>
                     </a:p>
                   </a:txBody>
@@ -5262,7 +5262,7 @@
                           </a:solidFill>
                           <a:latin typeface="Segoe UI"/>
                         </a:rPr>
-                        <a:t>$339.1K</a:t>
+                        <a:t>$337.9K</a:t>
                       </a:r>
                     </a:p>
                   </a:txBody>

--- a/generated/Tier 1 Broker Scorecards/GoldenEra Insurance Agency_Broker_Scorecard.pptx
+++ b/generated/Tier 1 Broker Scorecards/GoldenEra Insurance Agency_Broker_Scorecard.pptx
@@ -3394,7 +3394,7 @@
                         <a:rPr sz="900">
                           <a:latin typeface="Segoe UI"/>
                         </a:rPr>
-                        <a:t>Tier 1  |  24.37% / 15.00%</a:t>
+                        <a:t>Tier 1  |  24.49% / 15.00%</a:t>
                       </a:r>
                     </a:p>
                   </a:txBody>
@@ -3766,7 +3766,7 @@
                         <a:rPr sz="900">
                           <a:latin typeface="Segoe UI"/>
                         </a:rPr>
-                        <a:t>Non-Fleet Subs: 156  |  Binds: 28</a:t>
+                        <a:t>Non-Fleet Subs: 155  |  Binds: 28</a:t>
                       </a:r>
                     </a:p>
                   </a:txBody>
@@ -4351,7 +4351,7 @@
                           </a:solidFill>
                           <a:latin typeface="Segoe UI"/>
                         </a:rPr>
-                        <a:t>40</a:t>
+                        <a:t>39</a:t>
                       </a:r>
                     </a:p>
                   </a:txBody>
@@ -4428,7 +4428,7 @@
                           </a:solidFill>
                           <a:latin typeface="Segoe UI"/>
                         </a:rPr>
-                        <a:t>30</a:t>
+                        <a:t>32</a:t>
                       </a:r>
                     </a:p>
                   </a:txBody>
@@ -4624,7 +4624,7 @@
                           </a:solidFill>
                           <a:latin typeface="Segoe UI"/>
                         </a:rPr>
-                        <a:t>52.5%</a:t>
+                        <a:t>53.8%</a:t>
                       </a:r>
                     </a:p>
                   </a:txBody>
@@ -4707,7 +4707,7 @@
                           </a:solidFill>
                           <a:latin typeface="Segoe UI"/>
                         </a:rPr>
-                        <a:t>26.7%</a:t>
+                        <a:t>25.0%</a:t>
                       </a:r>
                     </a:p>
                   </a:txBody>

--- a/generated/Tier 1 Broker Scorecards/GoldenEra Insurance Agency_Broker_Scorecard.pptx
+++ b/generated/Tier 1 Broker Scorecards/GoldenEra Insurance Agency_Broker_Scorecard.pptx
@@ -3690,7 +3690,7 @@
                         <a:rPr sz="900">
                           <a:latin typeface="Segoe UI"/>
                         </a:rPr>
-                        <a:t>Fleet Bound Premium: $2,964,111.09</a:t>
+                        <a:t>Fleet Bound Premium: $2,964,007.90</a:t>
                       </a:r>
                     </a:p>
                   </a:txBody>
@@ -3803,7 +3803,7 @@
                         <a:rPr sz="900">
                           <a:latin typeface="Segoe UI"/>
                         </a:rPr>
-                        <a:t>Non-Fleet Bound Premium: $787,843.84</a:t>
+                        <a:t>Non-Fleet Bound Premium: $787,947.03</a:t>
                       </a:r>
                     </a:p>
                   </a:txBody>

--- a/generated/Tier 1 Broker Scorecards/GoldenEra Insurance Agency_Broker_Scorecard.pptx
+++ b/generated/Tier 1 Broker Scorecards/GoldenEra Insurance Agency_Broker_Scorecard.pptx
@@ -3357,7 +3357,7 @@
                         <a:rPr sz="800">
                           <a:latin typeface="Segoe UI"/>
                         </a:rPr>
-                        <a:t>$9,867,855.80 / $10,586,240.12 / $3,751,954.93</a:t>
+                        <a:t>$9,867,855.80 / $10,603,471.21 / $3,769,186.02</a:t>
                       </a:r>
                     </a:p>
                   </a:txBody>
@@ -3394,7 +3394,7 @@
                         <a:rPr sz="900">
                           <a:latin typeface="Segoe UI"/>
                         </a:rPr>
-                        <a:t>Tier 1  |  24.49% / 15.00%</a:t>
+                        <a:t>Tier 1  |  25.51% / 15.00%</a:t>
                       </a:r>
                     </a:p>
                   </a:txBody>
@@ -3431,7 +3431,7 @@
                         <a:rPr sz="900">
                           <a:latin typeface="Segoe UI"/>
                         </a:rPr>
-                        <a:t>$13,814,998.12  (27.2% achieved)</a:t>
+                        <a:t>$13,814,998.12  (27.3% achieved)</a:t>
                       </a:r>
                     </a:p>
                   </a:txBody>
@@ -3653,7 +3653,7 @@
                         <a:rPr sz="900">
                           <a:latin typeface="Segoe UI"/>
                         </a:rPr>
-                        <a:t>Fleet Subs: 41  |  Binds: 20</a:t>
+                        <a:t>Fleet Subs: 41  |  Binds: 21</a:t>
                       </a:r>
                     </a:p>
                   </a:txBody>
@@ -3690,7 +3690,7 @@
                         <a:rPr sz="900">
                           <a:latin typeface="Segoe UI"/>
                         </a:rPr>
-                        <a:t>Fleet Bound Premium: $2,964,007.90</a:t>
+                        <a:t>Fleet Bound Premium: $2,969,087.60</a:t>
                       </a:r>
                     </a:p>
                   </a:txBody>
@@ -3727,7 +3727,7 @@
                         <a:rPr sz="900">
                           <a:latin typeface="Segoe UI"/>
                         </a:rPr>
-                        <a:t>Fleet Book %: 79.0%</a:t>
+                        <a:t>Fleet Book %: 78.8%</a:t>
                       </a:r>
                     </a:p>
                   </a:txBody>
@@ -3766,7 +3766,7 @@
                         <a:rPr sz="900">
                           <a:latin typeface="Segoe UI"/>
                         </a:rPr>
-                        <a:t>Non-Fleet Subs: 155  |  Binds: 28</a:t>
+                        <a:t>Non-Fleet Subs: 155  |  Binds: 29</a:t>
                       </a:r>
                     </a:p>
                   </a:txBody>
@@ -3803,7 +3803,7 @@
                         <a:rPr sz="900">
                           <a:latin typeface="Segoe UI"/>
                         </a:rPr>
-                        <a:t>Non-Fleet Bound Premium: $787,947.03</a:t>
+                        <a:t>Non-Fleet Bound Premium: $800,098.42</a:t>
                       </a:r>
                     </a:p>
                   </a:txBody>
@@ -3840,7 +3840,7 @@
                         <a:rPr sz="900">
                           <a:latin typeface="Segoe UI"/>
                         </a:rPr>
-                        <a:t>Non-Fleet Book %: 21.0%</a:t>
+                        <a:t>Non-Fleet Book %: 21.2%</a:t>
                       </a:r>
                     </a:p>
                   </a:txBody>
@@ -4428,7 +4428,7 @@
                           </a:solidFill>
                           <a:latin typeface="Segoe UI"/>
                         </a:rPr>
-                        <a:t>32</a:t>
+                        <a:t>33</a:t>
                       </a:r>
                     </a:p>
                   </a:txBody>
@@ -4707,7 +4707,7 @@
                           </a:solidFill>
                           <a:latin typeface="Segoe UI"/>
                         </a:rPr>
-                        <a:t>25.0%</a:t>
+                        <a:t>30.3%</a:t>
                       </a:r>
                     </a:p>
                   </a:txBody>
@@ -4983,7 +4983,7 @@
                           </a:solidFill>
                           <a:latin typeface="Segoe UI"/>
                         </a:rPr>
-                        <a:t>8</a:t>
+                        <a:t>10</a:t>
                       </a:r>
                     </a:p>
                   </a:txBody>
@@ -5262,7 +5262,7 @@
                           </a:solidFill>
                           <a:latin typeface="Segoe UI"/>
                         </a:rPr>
-                        <a:t>$337.9K</a:t>
+                        <a:t>$355.2K</a:t>
                       </a:r>
                     </a:p>
                   </a:txBody>

--- a/generated/Tier 1 Broker Scorecards/GoldenEra Insurance Agency_Broker_Scorecard.pptx
+++ b/generated/Tier 1 Broker Scorecards/GoldenEra Insurance Agency_Broker_Scorecard.pptx
@@ -3690,7 +3690,7 @@
                         <a:rPr sz="900">
                           <a:latin typeface="Segoe UI"/>
                         </a:rPr>
-                        <a:t>Fleet Bound Premium: $2,969,087.60</a:t>
+                        <a:t>Fleet Bound Premium: $2,970,034.06</a:t>
                       </a:r>
                     </a:p>
                   </a:txBody>
@@ -3803,7 +3803,7 @@
                         <a:rPr sz="900">
                           <a:latin typeface="Segoe UI"/>
                         </a:rPr>
-                        <a:t>Non-Fleet Bound Premium: $800,098.42</a:t>
+                        <a:t>Non-Fleet Bound Premium: $799,151.96</a:t>
                       </a:r>
                     </a:p>
                   </a:txBody>

--- a/generated/Tier 1 Broker Scorecards/GoldenEra Insurance Agency_Broker_Scorecard.pptx
+++ b/generated/Tier 1 Broker Scorecards/GoldenEra Insurance Agency_Broker_Scorecard.pptx
@@ -3357,7 +3357,7 @@
                         <a:rPr sz="800">
                           <a:latin typeface="Segoe UI"/>
                         </a:rPr>
-                        <a:t>$9,867,855.80 / $10,603,471.21 / $3,769,186.02</a:t>
+                        <a:t>$9,867,855.80 / $9,799,541.45 / $3,769,186.02</a:t>
                       </a:r>
                     </a:p>
                   </a:txBody>
@@ -3690,7 +3690,7 @@
                         <a:rPr sz="900">
                           <a:latin typeface="Segoe UI"/>
                         </a:rPr>
-                        <a:t>Fleet Bound Premium: $2,970,034.06</a:t>
+                        <a:t>Fleet Bound Premium: $2,970,132.72</a:t>
                       </a:r>
                     </a:p>
                   </a:txBody>
@@ -3803,7 +3803,7 @@
                         <a:rPr sz="900">
                           <a:latin typeface="Segoe UI"/>
                         </a:rPr>
-                        <a:t>Non-Fleet Bound Premium: $799,151.96</a:t>
+                        <a:t>Non-Fleet Bound Premium: $799,053.30</a:t>
                       </a:r>
                     </a:p>
                   </a:txBody>
